--- a/Presentations/AVR Live Class 6.pptx
+++ b/Presentations/AVR Live Class 6.pptx
@@ -5,7 +5,7 @@
     <p:sldMasterId id="2147483654" r:id="rId1"/>
   </p:sldMasterIdLst>
   <p:notesMasterIdLst>
-    <p:notesMasterId r:id="rId14"/>
+    <p:notesMasterId r:id="rId15"/>
   </p:notesMasterIdLst>
   <p:sldIdLst>
     <p:sldId id="256" r:id="rId2"/>
@@ -19,27 +19,28 @@
     <p:sldId id="288" r:id="rId10"/>
     <p:sldId id="289" r:id="rId11"/>
     <p:sldId id="274" r:id="rId12"/>
-    <p:sldId id="264" r:id="rId13"/>
+    <p:sldId id="290" r:id="rId13"/>
+    <p:sldId id="264" r:id="rId14"/>
   </p:sldIdLst>
   <p:sldSz cx="9144000" cy="5143500" type="screen16x9"/>
   <p:notesSz cx="6858000" cy="9144000"/>
   <p:embeddedFontLst>
     <p:embeddedFont>
       <p:font typeface="Anek Malayalam" panose="020B0604020202020204" charset="0"/>
-      <p:regular r:id="rId15"/>
-      <p:bold r:id="rId16"/>
+      <p:regular r:id="rId16"/>
+      <p:bold r:id="rId17"/>
     </p:embeddedFont>
     <p:embeddedFont>
       <p:font typeface="Anek Malayalam SemiBold" panose="020B0604020202020204" charset="0"/>
-      <p:regular r:id="rId17"/>
-      <p:bold r:id="rId18"/>
+      <p:regular r:id="rId18"/>
+      <p:bold r:id="rId19"/>
     </p:embeddedFont>
     <p:embeddedFont>
       <p:font typeface="Helvetica Neue" panose="020B0604020202020204" charset="0"/>
-      <p:regular r:id="rId19"/>
-      <p:bold r:id="rId20"/>
-      <p:italic r:id="rId21"/>
-      <p:boldItalic r:id="rId22"/>
+      <p:regular r:id="rId20"/>
+      <p:bold r:id="rId21"/>
+      <p:italic r:id="rId22"/>
+      <p:boldItalic r:id="rId23"/>
     </p:embeddedFont>
   </p:embeddedFontLst>
   <p:defaultTextStyle>
@@ -290,53 +291,23 @@
 </p:presentation>
 </file>
 
-<file path=ppt/revisionInfo.xml><?xml version="1.0" encoding="utf-8"?>
-<p1510:revInfo xmlns:a="http://schemas.openxmlformats.org/drawingml/2006/main" xmlns:r="http://schemas.openxmlformats.org/officeDocument/2006/relationships" xmlns:p1510="http://schemas.microsoft.com/office/powerpoint/2015/10/main">
-  <p1510:revLst>
-    <p1510:client id="{EA560888-4EB2-492C-882E-743435FBF237}" v="15" dt="2025-09-17T14:14:26.362"/>
-  </p1510:revLst>
-</p1510:revInfo>
-</file>
-
 <file path=ppt/changesInfos/changesInfo1.xml><?xml version="1.0" encoding="utf-8"?>
 <pc:chgInfo xmlns:a="http://schemas.openxmlformats.org/drawingml/2006/main" xmlns:r="http://schemas.openxmlformats.org/officeDocument/2006/relationships" xmlns:ac="http://schemas.microsoft.com/office/drawing/2013/main/command" xmlns:pc="http://schemas.microsoft.com/office/powerpoint/2013/main/command">
   <pc:docChgLst>
     <pc:chgData name="Sreejith Rajan" userId="ec11bca0e4bee75f" providerId="LiveId" clId="{7B4F392D-EAB3-4CE7-903E-F84869825F47}"/>
     <pc:docChg chg="undo custSel addSld delSld modSld sldOrd">
-      <pc:chgData name="Sreejith Rajan" userId="ec11bca0e4bee75f" providerId="LiveId" clId="{7B4F392D-EAB3-4CE7-903E-F84869825F47}" dt="2025-09-19T07:57:25.467" v="536" actId="20577"/>
+      <pc:chgData name="Sreejith Rajan" userId="ec11bca0e4bee75f" providerId="LiveId" clId="{7B4F392D-EAB3-4CE7-903E-F84869825F47}" dt="2025-11-27T14:57:36.436" v="824" actId="1076"/>
       <pc:docMkLst>
         <pc:docMk/>
       </pc:docMkLst>
-      <pc:sldChg chg="ord">
-        <pc:chgData name="Sreejith Rajan" userId="ec11bca0e4bee75f" providerId="LiveId" clId="{7B4F392D-EAB3-4CE7-903E-F84869825F47}" dt="2025-09-17T13:23:13.138" v="142"/>
-        <pc:sldMkLst>
-          <pc:docMk/>
-          <pc:sldMk cId="0" sldId="258"/>
-        </pc:sldMkLst>
-      </pc:sldChg>
-      <pc:sldChg chg="del">
-        <pc:chgData name="Sreejith Rajan" userId="ec11bca0e4bee75f" providerId="LiveId" clId="{7B4F392D-EAB3-4CE7-903E-F84869825F47}" dt="2025-09-17T13:21:32.841" v="0" actId="47"/>
-        <pc:sldMkLst>
-          <pc:docMk/>
-          <pc:sldMk cId="0" sldId="259"/>
-        </pc:sldMkLst>
-      </pc:sldChg>
-      <pc:sldChg chg="addSp delSp modSp mod">
-        <pc:chgData name="Sreejith Rajan" userId="ec11bca0e4bee75f" providerId="LiveId" clId="{7B4F392D-EAB3-4CE7-903E-F84869825F47}" dt="2025-09-17T13:51:54.520" v="334"/>
+      <pc:sldChg chg="modSp mod">
+        <pc:chgData name="Sreejith Rajan" userId="ec11bca0e4bee75f" providerId="LiveId" clId="{7B4F392D-EAB3-4CE7-903E-F84869825F47}" dt="2025-11-27T14:57:36.436" v="824" actId="1076"/>
         <pc:sldMkLst>
           <pc:docMk/>
           <pc:sldMk cId="1389626550" sldId="267"/>
         </pc:sldMkLst>
-        <pc:spChg chg="add mod">
-          <ac:chgData name="Sreejith Rajan" userId="ec11bca0e4bee75f" providerId="LiveId" clId="{7B4F392D-EAB3-4CE7-903E-F84869825F47}" dt="2025-09-17T13:51:10.794" v="330" actId="20577"/>
-          <ac:spMkLst>
-            <pc:docMk/>
-            <pc:sldMk cId="1389626550" sldId="267"/>
-            <ac:spMk id="8" creationId="{6C9CC41F-9FD7-9D53-4AC5-97DFC8CE4F6C}"/>
-          </ac:spMkLst>
-        </pc:spChg>
         <pc:picChg chg="mod">
-          <ac:chgData name="Sreejith Rajan" userId="ec11bca0e4bee75f" providerId="LiveId" clId="{7B4F392D-EAB3-4CE7-903E-F84869825F47}" dt="2025-09-17T13:50:15.784" v="313" actId="1076"/>
+          <ac:chgData name="Sreejith Rajan" userId="ec11bca0e4bee75f" providerId="LiveId" clId="{7B4F392D-EAB3-4CE7-903E-F84869825F47}" dt="2025-11-27T14:57:36.436" v="824" actId="1076"/>
           <ac:picMkLst>
             <pc:docMk/>
             <pc:sldMk cId="1389626550" sldId="267"/>
@@ -345,13 +316,13 @@
         </pc:picChg>
       </pc:sldChg>
       <pc:sldChg chg="delSp modSp mod">
-        <pc:chgData name="Sreejith Rajan" userId="ec11bca0e4bee75f" providerId="LiveId" clId="{7B4F392D-EAB3-4CE7-903E-F84869825F47}" dt="2025-09-17T14:14:57.678" v="534" actId="20577"/>
+        <pc:chgData name="Sreejith Rajan" userId="ec11bca0e4bee75f" providerId="LiveId" clId="{7B4F392D-EAB3-4CE7-903E-F84869825F47}" dt="2025-11-25T13:50:35.880" v="537" actId="1076"/>
         <pc:sldMkLst>
           <pc:docMk/>
           <pc:sldMk cId="2517281589" sldId="274"/>
         </pc:sldMkLst>
         <pc:spChg chg="mod">
-          <ac:chgData name="Sreejith Rajan" userId="ec11bca0e4bee75f" providerId="LiveId" clId="{7B4F392D-EAB3-4CE7-903E-F84869825F47}" dt="2025-09-17T14:14:57.678" v="534" actId="20577"/>
+          <ac:chgData name="Sreejith Rajan" userId="ec11bca0e4bee75f" providerId="LiveId" clId="{7B4F392D-EAB3-4CE7-903E-F84869825F47}" dt="2025-11-25T13:50:35.880" v="537" actId="1076"/>
           <ac:spMkLst>
             <pc:docMk/>
             <pc:sldMk cId="2517281589" sldId="274"/>
@@ -359,177 +330,18 @@
           </ac:spMkLst>
         </pc:spChg>
       </pc:sldChg>
-      <pc:sldChg chg="del">
-        <pc:chgData name="Sreejith Rajan" userId="ec11bca0e4bee75f" providerId="LiveId" clId="{7B4F392D-EAB3-4CE7-903E-F84869825F47}" dt="2025-09-17T13:21:39.156" v="1" actId="47"/>
+      <pc:sldChg chg="addSp delSp modSp add mod">
+        <pc:chgData name="Sreejith Rajan" userId="ec11bca0e4bee75f" providerId="LiveId" clId="{7B4F392D-EAB3-4CE7-903E-F84869825F47}" dt="2025-11-25T15:36:41.492" v="822" actId="12"/>
         <pc:sldMkLst>
           <pc:docMk/>
-          <pc:sldMk cId="280470215" sldId="281"/>
-        </pc:sldMkLst>
-      </pc:sldChg>
-      <pc:sldChg chg="delSp modSp mod">
-        <pc:chgData name="Sreejith Rajan" userId="ec11bca0e4bee75f" providerId="LiveId" clId="{7B4F392D-EAB3-4CE7-903E-F84869825F47}" dt="2025-09-17T15:25:58.076" v="535" actId="1076"/>
-        <pc:sldMkLst>
-          <pc:docMk/>
-          <pc:sldMk cId="3362503428" sldId="283"/>
+          <pc:sldMk cId="1559068308" sldId="290"/>
         </pc:sldMkLst>
         <pc:spChg chg="mod">
-          <ac:chgData name="Sreejith Rajan" userId="ec11bca0e4bee75f" providerId="LiveId" clId="{7B4F392D-EAB3-4CE7-903E-F84869825F47}" dt="2025-09-17T13:58:53.830" v="399" actId="20577"/>
+          <ac:chgData name="Sreejith Rajan" userId="ec11bca0e4bee75f" providerId="LiveId" clId="{7B4F392D-EAB3-4CE7-903E-F84869825F47}" dt="2025-11-25T15:36:41.492" v="822" actId="12"/>
           <ac:spMkLst>
             <pc:docMk/>
-            <pc:sldMk cId="3362503428" sldId="283"/>
-            <ac:spMk id="54" creationId="{165450FA-9AB0-DAAA-8787-5819DF6E52EE}"/>
-          </ac:spMkLst>
-        </pc:spChg>
-        <pc:picChg chg="mod">
-          <ac:chgData name="Sreejith Rajan" userId="ec11bca0e4bee75f" providerId="LiveId" clId="{7B4F392D-EAB3-4CE7-903E-F84869825F47}" dt="2025-09-17T15:25:58.076" v="535" actId="1076"/>
-          <ac:picMkLst>
-            <pc:docMk/>
-            <pc:sldMk cId="3362503428" sldId="283"/>
-            <ac:picMk id="3" creationId="{F7648779-8BF8-78D3-9138-28544F501A87}"/>
-          </ac:picMkLst>
-        </pc:picChg>
-      </pc:sldChg>
-      <pc:sldChg chg="del">
-        <pc:chgData name="Sreejith Rajan" userId="ec11bca0e4bee75f" providerId="LiveId" clId="{7B4F392D-EAB3-4CE7-903E-F84869825F47}" dt="2025-09-17T13:56:47.838" v="353" actId="47"/>
-        <pc:sldMkLst>
-          <pc:docMk/>
-          <pc:sldMk cId="3896615428" sldId="284"/>
-        </pc:sldMkLst>
-      </pc:sldChg>
-      <pc:sldChg chg="new del">
-        <pc:chgData name="Sreejith Rajan" userId="ec11bca0e4bee75f" providerId="LiveId" clId="{7B4F392D-EAB3-4CE7-903E-F84869825F47}" dt="2025-09-17T13:21:59.735" v="3" actId="680"/>
-        <pc:sldMkLst>
-          <pc:docMk/>
-          <pc:sldMk cId="1543076818" sldId="285"/>
-        </pc:sldMkLst>
-      </pc:sldChg>
-      <pc:sldChg chg="modSp add mod ord">
-        <pc:chgData name="Sreejith Rajan" userId="ec11bca0e4bee75f" providerId="LiveId" clId="{7B4F392D-EAB3-4CE7-903E-F84869825F47}" dt="2025-09-17T13:23:19.786" v="144"/>
-        <pc:sldMkLst>
-          <pc:docMk/>
-          <pc:sldMk cId="2771709912" sldId="285"/>
-        </pc:sldMkLst>
-        <pc:spChg chg="mod">
-          <ac:chgData name="Sreejith Rajan" userId="ec11bca0e4bee75f" providerId="LiveId" clId="{7B4F392D-EAB3-4CE7-903E-F84869825F47}" dt="2025-09-17T13:22:15.009" v="18" actId="20577"/>
-          <ac:spMkLst>
-            <pc:docMk/>
-            <pc:sldMk cId="2771709912" sldId="285"/>
-            <ac:spMk id="46" creationId="{AD0C9125-2529-87A6-A821-EF0157BECEF2}"/>
-          </ac:spMkLst>
-        </pc:spChg>
-        <pc:spChg chg="mod">
-          <ac:chgData name="Sreejith Rajan" userId="ec11bca0e4bee75f" providerId="LiveId" clId="{7B4F392D-EAB3-4CE7-903E-F84869825F47}" dt="2025-09-17T13:22:59.587" v="140" actId="20577"/>
-          <ac:spMkLst>
-            <pc:docMk/>
-            <pc:sldMk cId="2771709912" sldId="285"/>
-            <ac:spMk id="47" creationId="{E974ABAE-A1E9-5AF4-4F05-9A6B3B72156A}"/>
-          </ac:spMkLst>
-        </pc:spChg>
-      </pc:sldChg>
-      <pc:sldChg chg="delSp modSp add mod">
-        <pc:chgData name="Sreejith Rajan" userId="ec11bca0e4bee75f" providerId="LiveId" clId="{7B4F392D-EAB3-4CE7-903E-F84869825F47}" dt="2025-09-19T07:57:25.467" v="536" actId="20577"/>
-        <pc:sldMkLst>
-          <pc:docMk/>
-          <pc:sldMk cId="321485736" sldId="286"/>
-        </pc:sldMkLst>
-        <pc:spChg chg="mod">
-          <ac:chgData name="Sreejith Rajan" userId="ec11bca0e4bee75f" providerId="LiveId" clId="{7B4F392D-EAB3-4CE7-903E-F84869825F47}" dt="2025-09-19T07:57:25.467" v="536" actId="20577"/>
-          <ac:spMkLst>
-            <pc:docMk/>
-            <pc:sldMk cId="321485736" sldId="286"/>
-            <ac:spMk id="6" creationId="{740412F8-2E7C-D19E-3403-4E720E15525B}"/>
-          </ac:spMkLst>
-        </pc:spChg>
-        <pc:spChg chg="mod">
-          <ac:chgData name="Sreejith Rajan" userId="ec11bca0e4bee75f" providerId="LiveId" clId="{7B4F392D-EAB3-4CE7-903E-F84869825F47}" dt="2025-09-17T13:45:42.838" v="181" actId="20577"/>
-          <ac:spMkLst>
-            <pc:docMk/>
-            <pc:sldMk cId="321485736" sldId="286"/>
-            <ac:spMk id="54" creationId="{7CF02AB0-3097-4201-BB91-6344C477C173}"/>
-          </ac:spMkLst>
-        </pc:spChg>
-        <pc:spChg chg="mod">
-          <ac:chgData name="Sreejith Rajan" userId="ec11bca0e4bee75f" providerId="LiveId" clId="{7B4F392D-EAB3-4CE7-903E-F84869825F47}" dt="2025-09-17T13:54:53.675" v="335" actId="5793"/>
-          <ac:spMkLst>
-            <pc:docMk/>
-            <pc:sldMk cId="321485736" sldId="286"/>
-            <ac:spMk id="55" creationId="{1E807AC9-7841-0A74-4868-AF16F9E34C0A}"/>
-          </ac:spMkLst>
-        </pc:spChg>
-      </pc:sldChg>
-      <pc:sldChg chg="new del">
-        <pc:chgData name="Sreejith Rajan" userId="ec11bca0e4bee75f" providerId="LiveId" clId="{7B4F392D-EAB3-4CE7-903E-F84869825F47}" dt="2025-09-17T13:44:27.747" v="152" actId="47"/>
-        <pc:sldMkLst>
-          <pc:docMk/>
-          <pc:sldMk cId="89909600" sldId="287"/>
-        </pc:sldMkLst>
-      </pc:sldChg>
-      <pc:sldChg chg="delSp modSp add mod">
-        <pc:chgData name="Sreejith Rajan" userId="ec11bca0e4bee75f" providerId="LiveId" clId="{7B4F392D-EAB3-4CE7-903E-F84869825F47}" dt="2025-09-17T13:56:16.149" v="352" actId="207"/>
-        <pc:sldMkLst>
-          <pc:docMk/>
-          <pc:sldMk cId="3959199433" sldId="287"/>
-        </pc:sldMkLst>
-        <pc:spChg chg="mod">
-          <ac:chgData name="Sreejith Rajan" userId="ec11bca0e4bee75f" providerId="LiveId" clId="{7B4F392D-EAB3-4CE7-903E-F84869825F47}" dt="2025-09-17T13:55:15.923" v="345" actId="20577"/>
-          <ac:spMkLst>
-            <pc:docMk/>
-            <pc:sldMk cId="3959199433" sldId="287"/>
-            <ac:spMk id="54" creationId="{C4CE2FAD-1A13-21FB-4CDB-D7E0702E4157}"/>
-          </ac:spMkLst>
-        </pc:spChg>
-        <pc:spChg chg="mod">
-          <ac:chgData name="Sreejith Rajan" userId="ec11bca0e4bee75f" providerId="LiveId" clId="{7B4F392D-EAB3-4CE7-903E-F84869825F47}" dt="2025-09-17T13:56:16.149" v="352" actId="207"/>
-          <ac:spMkLst>
-            <pc:docMk/>
-            <pc:sldMk cId="3959199433" sldId="287"/>
-            <ac:spMk id="55" creationId="{FF1E4D12-E5A8-7B19-694A-8370FEB4E421}"/>
-          </ac:spMkLst>
-        </pc:spChg>
-      </pc:sldChg>
-      <pc:sldChg chg="delSp modSp add mod">
-        <pc:chgData name="Sreejith Rajan" userId="ec11bca0e4bee75f" providerId="LiveId" clId="{7B4F392D-EAB3-4CE7-903E-F84869825F47}" dt="2025-09-17T14:02:00.662" v="450" actId="20577"/>
-        <pc:sldMkLst>
-          <pc:docMk/>
-          <pc:sldMk cId="1933302962" sldId="288"/>
-        </pc:sldMkLst>
-        <pc:spChg chg="mod">
-          <ac:chgData name="Sreejith Rajan" userId="ec11bca0e4bee75f" providerId="LiveId" clId="{7B4F392D-EAB3-4CE7-903E-F84869825F47}" dt="2025-09-17T14:02:00.662" v="450" actId="20577"/>
-          <ac:spMkLst>
-            <pc:docMk/>
-            <pc:sldMk cId="1933302962" sldId="288"/>
-            <ac:spMk id="54" creationId="{7A645367-F02C-F692-8F93-F06795DD6121}"/>
-          </ac:spMkLst>
-        </pc:spChg>
-        <pc:spChg chg="mod">
-          <ac:chgData name="Sreejith Rajan" userId="ec11bca0e4bee75f" providerId="LiveId" clId="{7B4F392D-EAB3-4CE7-903E-F84869825F47}" dt="2025-09-17T14:01:29.784" v="419" actId="27636"/>
-          <ac:spMkLst>
-            <pc:docMk/>
-            <pc:sldMk cId="1933302962" sldId="288"/>
-            <ac:spMk id="55" creationId="{250CD63C-B82C-1DD0-0CBB-C3C42C9943E2}"/>
-          </ac:spMkLst>
-        </pc:spChg>
-      </pc:sldChg>
-      <pc:sldChg chg="modSp add mod">
-        <pc:chgData name="Sreejith Rajan" userId="ec11bca0e4bee75f" providerId="LiveId" clId="{7B4F392D-EAB3-4CE7-903E-F84869825F47}" dt="2025-09-17T14:14:33.331" v="508" actId="207"/>
-        <pc:sldMkLst>
-          <pc:docMk/>
-          <pc:sldMk cId="1380718396" sldId="289"/>
-        </pc:sldMkLst>
-        <pc:spChg chg="mod">
-          <ac:chgData name="Sreejith Rajan" userId="ec11bca0e4bee75f" providerId="LiveId" clId="{7B4F392D-EAB3-4CE7-903E-F84869825F47}" dt="2025-09-17T14:13:49.569" v="480" actId="20577"/>
-          <ac:spMkLst>
-            <pc:docMk/>
-            <pc:sldMk cId="1380718396" sldId="289"/>
-            <ac:spMk id="54" creationId="{DC0A506D-8409-EBD5-AA7A-99B5961272EF}"/>
-          </ac:spMkLst>
-        </pc:spChg>
-        <pc:spChg chg="mod">
-          <ac:chgData name="Sreejith Rajan" userId="ec11bca0e4bee75f" providerId="LiveId" clId="{7B4F392D-EAB3-4CE7-903E-F84869825F47}" dt="2025-09-17T14:14:33.331" v="508" actId="207"/>
-          <ac:spMkLst>
-            <pc:docMk/>
-            <pc:sldMk cId="1380718396" sldId="289"/>
-            <ac:spMk id="55" creationId="{D02D7CAE-38F8-8545-FFF6-1F577A01BE56}"/>
+            <pc:sldMk cId="1559068308" sldId="290"/>
+            <ac:spMk id="54" creationId="{68629363-375B-DB57-5488-0DDA54605AC4}"/>
           </ac:spMkLst>
         </pc:spChg>
       </pc:sldChg>
@@ -1338,6 +1150,133 @@
 </file>
 
 <file path=ppt/notesSlides/notesSlide12.xml><?xml version="1.0" encoding="utf-8"?>
+<p:notes xmlns:a="http://schemas.openxmlformats.org/drawingml/2006/main" xmlns:r="http://schemas.openxmlformats.org/officeDocument/2006/relationships" xmlns:p="http://schemas.openxmlformats.org/presentationml/2006/main" showMasterSp="0" showMasterPhAnim="0">
+  <p:cSld>
+    <p:spTree>
+      <p:nvGrpSpPr>
+        <p:cNvPr id="1" name="Shape 50">
+          <a:extLst>
+            <a:ext uri="{FF2B5EF4-FFF2-40B4-BE49-F238E27FC236}">
+              <a16:creationId xmlns:a16="http://schemas.microsoft.com/office/drawing/2014/main" id="{1AA91EF1-F4F8-4BA5-6ED6-F854108116F7}"/>
+            </a:ext>
+          </a:extLst>
+        </p:cNvPr>
+        <p:cNvGrpSpPr/>
+        <p:nvPr/>
+      </p:nvGrpSpPr>
+      <p:grpSpPr>
+        <a:xfrm>
+          <a:off x="0" y="0"/>
+          <a:ext cx="0" cy="0"/>
+          <a:chOff x="0" y="0"/>
+          <a:chExt cx="0" cy="0"/>
+        </a:xfrm>
+      </p:grpSpPr>
+      <p:sp>
+        <p:nvSpPr>
+          <p:cNvPr id="51" name="Google Shape;51;g2ff2b50d283_0_18:notes">
+            <a:extLst>
+              <a:ext uri="{FF2B5EF4-FFF2-40B4-BE49-F238E27FC236}">
+                <a16:creationId xmlns:a16="http://schemas.microsoft.com/office/drawing/2014/main" id="{64A28E32-E2D5-323E-A102-D135EF20C9E9}"/>
+              </a:ext>
+            </a:extLst>
+          </p:cNvPr>
+          <p:cNvSpPr>
+            <a:spLocks noGrp="1" noRot="1" noChangeAspect="1"/>
+          </p:cNvSpPr>
+          <p:nvPr>
+            <p:ph type="sldImg" idx="2"/>
+          </p:nvPr>
+        </p:nvSpPr>
+        <p:spPr>
+          <a:xfrm>
+            <a:off x="381000" y="685800"/>
+            <a:ext cx="6096000" cy="3429000"/>
+          </a:xfrm>
+          <a:custGeom>
+            <a:avLst/>
+            <a:gdLst/>
+            <a:ahLst/>
+            <a:cxnLst/>
+            <a:rect l="l" t="t" r="r" b="b"/>
+            <a:pathLst>
+              <a:path w="120000" h="120000" extrusionOk="0">
+                <a:moveTo>
+                  <a:pt x="0" y="0"/>
+                </a:moveTo>
+                <a:lnTo>
+                  <a:pt x="120000" y="0"/>
+                </a:lnTo>
+                <a:lnTo>
+                  <a:pt x="120000" y="120000"/>
+                </a:lnTo>
+                <a:lnTo>
+                  <a:pt x="0" y="120000"/>
+                </a:lnTo>
+                <a:close/>
+              </a:path>
+            </a:pathLst>
+          </a:custGeom>
+        </p:spPr>
+      </p:sp>
+      <p:sp>
+        <p:nvSpPr>
+          <p:cNvPr id="52" name="Google Shape;52;g2ff2b50d283_0_18:notes">
+            <a:extLst>
+              <a:ext uri="{FF2B5EF4-FFF2-40B4-BE49-F238E27FC236}">
+                <a16:creationId xmlns:a16="http://schemas.microsoft.com/office/drawing/2014/main" id="{BE4DA740-1EDA-D053-2F5B-A1161A48EE40}"/>
+              </a:ext>
+            </a:extLst>
+          </p:cNvPr>
+          <p:cNvSpPr txBox="1">
+            <a:spLocks noGrp="1"/>
+          </p:cNvSpPr>
+          <p:nvPr>
+            <p:ph type="body" idx="1"/>
+          </p:nvPr>
+        </p:nvSpPr>
+        <p:spPr>
+          <a:xfrm>
+            <a:off x="685800" y="4343400"/>
+            <a:ext cx="5486400" cy="4114800"/>
+          </a:xfrm>
+          <a:prstGeom prst="rect">
+            <a:avLst/>
+          </a:prstGeom>
+        </p:spPr>
+        <p:txBody>
+          <a:bodyPr spcFirstLastPara="1" wrap="square" lIns="91425" tIns="91425" rIns="91425" bIns="91425" anchor="t" anchorCtr="0">
+            <a:noAutofit/>
+          </a:bodyPr>
+          <a:lstStyle/>
+          <a:p>
+            <a:pPr marL="0" lvl="0" indent="0" algn="l" rtl="0">
+              <a:spcBef>
+                <a:spcPts val="0"/>
+              </a:spcBef>
+              <a:spcAft>
+                <a:spcPts val="0"/>
+              </a:spcAft>
+              <a:buNone/>
+            </a:pPr>
+            <a:endParaRPr/>
+          </a:p>
+        </p:txBody>
+      </p:sp>
+    </p:spTree>
+    <p:extLst>
+      <p:ext uri="{BB962C8B-B14F-4D97-AF65-F5344CB8AC3E}">
+        <p14:creationId xmlns:p14="http://schemas.microsoft.com/office/powerpoint/2010/main" val="3949608794"/>
+      </p:ext>
+    </p:extLst>
+  </p:cSld>
+  <p:clrMapOvr>
+    <a:masterClrMapping/>
+  </p:clrMapOvr>
+</p:notes>
+</file>
+
+<file path=ppt/notesSlides/notesSlide13.xml><?xml version="1.0" encoding="utf-8"?>
 <p:notes xmlns:a="http://schemas.openxmlformats.org/drawingml/2006/main" xmlns:r="http://schemas.openxmlformats.org/officeDocument/2006/relationships" xmlns:p="http://schemas.openxmlformats.org/presentationml/2006/main" showMasterSp="0" showMasterPhAnim="0">
   <p:cSld>
     <p:spTree>
@@ -5747,7 +5686,7 @@
         </p:nvSpPr>
         <p:spPr>
           <a:xfrm>
-            <a:off x="2884993" y="2263973"/>
+            <a:off x="2981585" y="1980085"/>
             <a:ext cx="5982111" cy="991621"/>
           </a:xfrm>
           <a:prstGeom prst="rect">
@@ -5952,6 +5891,214 @@
 </file>
 
 <file path=ppt/slides/slide12.xml><?xml version="1.0" encoding="utf-8"?>
+<p:sld xmlns:a="http://schemas.openxmlformats.org/drawingml/2006/main" xmlns:r="http://schemas.openxmlformats.org/officeDocument/2006/relationships" xmlns:p="http://schemas.openxmlformats.org/presentationml/2006/main">
+  <p:cSld>
+    <p:spTree>
+      <p:nvGrpSpPr>
+        <p:cNvPr id="1" name="Shape 53">
+          <a:extLst>
+            <a:ext uri="{FF2B5EF4-FFF2-40B4-BE49-F238E27FC236}">
+              <a16:creationId xmlns:a16="http://schemas.microsoft.com/office/drawing/2014/main" id="{AC616DB9-EDD8-6CBE-8713-9794961E572C}"/>
+            </a:ext>
+          </a:extLst>
+        </p:cNvPr>
+        <p:cNvGrpSpPr/>
+        <p:nvPr/>
+      </p:nvGrpSpPr>
+      <p:grpSpPr>
+        <a:xfrm>
+          <a:off x="0" y="0"/>
+          <a:ext cx="0" cy="0"/>
+          <a:chOff x="0" y="0"/>
+          <a:chExt cx="0" cy="0"/>
+        </a:xfrm>
+      </p:grpSpPr>
+      <p:sp>
+        <p:nvSpPr>
+          <p:cNvPr id="54" name="Google Shape;54;p11">
+            <a:extLst>
+              <a:ext uri="{FF2B5EF4-FFF2-40B4-BE49-F238E27FC236}">
+                <a16:creationId xmlns:a16="http://schemas.microsoft.com/office/drawing/2014/main" id="{68629363-375B-DB57-5488-0DDA54605AC4}"/>
+              </a:ext>
+            </a:extLst>
+          </p:cNvPr>
+          <p:cNvSpPr txBox="1">
+            <a:spLocks noGrp="1"/>
+          </p:cNvSpPr>
+          <p:nvPr>
+            <p:ph type="title"/>
+          </p:nvPr>
+        </p:nvSpPr>
+        <p:spPr>
+          <a:xfrm>
+            <a:off x="2640295" y="347474"/>
+            <a:ext cx="5982111" cy="3194215"/>
+          </a:xfrm>
+          <a:prstGeom prst="rect">
+            <a:avLst/>
+          </a:prstGeom>
+        </p:spPr>
+        <p:txBody>
+          <a:bodyPr spcFirstLastPara="1" wrap="square" lIns="91425" tIns="91425" rIns="91425" bIns="91425" anchor="t" anchorCtr="0">
+            <a:normAutofit fontScale="90000"/>
+          </a:bodyPr>
+          <a:lstStyle/>
+          <a:p>
+            <a:pPr marL="457200" lvl="0" indent="-457200" algn="l" rtl="0">
+              <a:spcBef>
+                <a:spcPts val="0"/>
+              </a:spcBef>
+              <a:spcAft>
+                <a:spcPts val="0"/>
+              </a:spcAft>
+              <a:buFont typeface="Arial" panose="020B0604020202020204" pitchFamily="34" charset="0"/>
+              <a:buChar char="•"/>
+            </a:pPr>
+            <a:r>
+              <a:rPr lang="en-IN" dirty="0"/>
+              <a:t>Load TCNT0  - IE Minimum value </a:t>
+            </a:r>
+            <a:br>
+              <a:rPr lang="en-IN" dirty="0"/>
+            </a:br>
+            <a:r>
+              <a:rPr lang="en-IN" dirty="0"/>
+              <a:t>configure normal mode </a:t>
+            </a:r>
+            <a:br>
+              <a:rPr lang="en-IN" dirty="0"/>
+            </a:br>
+            <a:r>
+              <a:rPr lang="en-IN" dirty="0"/>
+              <a:t>configure no </a:t>
+            </a:r>
+            <a:r>
+              <a:rPr lang="en-IN" dirty="0" err="1"/>
+              <a:t>prescaling</a:t>
+            </a:r>
+            <a:r>
+              <a:rPr lang="en-IN" dirty="0"/>
+              <a:t> </a:t>
+            </a:r>
+            <a:br>
+              <a:rPr lang="en-IN" dirty="0"/>
+            </a:br>
+            <a:r>
+              <a:rPr lang="en-IN" dirty="0"/>
+              <a:t>configure loop (find out count for required delay)</a:t>
+            </a:r>
+            <a:br>
+              <a:rPr lang="en-IN" dirty="0"/>
+            </a:br>
+            <a:r>
+              <a:rPr lang="en-IN" dirty="0"/>
+              <a:t>wait until the TOV0 flag is set</a:t>
+            </a:r>
+            <a:br>
+              <a:rPr lang="en-IN" dirty="0"/>
+            </a:br>
+            <a:r>
+              <a:rPr lang="en-IN" dirty="0"/>
+              <a:t>reset TOV0 Flag</a:t>
+            </a:r>
+            <a:br>
+              <a:rPr lang="en-IN" dirty="0"/>
+            </a:br>
+            <a:r>
+              <a:rPr lang="en-IN" dirty="0"/>
+              <a:t>Repeat loop until condition is violated </a:t>
+            </a:r>
+            <a:br>
+              <a:rPr lang="en-IN" dirty="0"/>
+            </a:br>
+            <a:endParaRPr dirty="0"/>
+          </a:p>
+        </p:txBody>
+      </p:sp>
+      <p:sp>
+        <p:nvSpPr>
+          <p:cNvPr id="6" name="TextBox 5">
+            <a:extLst>
+              <a:ext uri="{FF2B5EF4-FFF2-40B4-BE49-F238E27FC236}">
+                <a16:creationId xmlns:a16="http://schemas.microsoft.com/office/drawing/2014/main" id="{5B24B80B-0B92-CD7D-685B-7A4A59BC85EE}"/>
+              </a:ext>
+            </a:extLst>
+          </p:cNvPr>
+          <p:cNvSpPr txBox="1"/>
+          <p:nvPr/>
+        </p:nvSpPr>
+        <p:spPr>
+          <a:xfrm>
+            <a:off x="4379174" y="1814287"/>
+            <a:ext cx="284052" cy="307777"/>
+          </a:xfrm>
+          <a:prstGeom prst="rect">
+            <a:avLst/>
+          </a:prstGeom>
+          <a:noFill/>
+        </p:spPr>
+        <p:txBody>
+          <a:bodyPr wrap="none" rtlCol="0">
+            <a:spAutoFit/>
+          </a:bodyPr>
+          <a:lstStyle/>
+          <a:p>
+            <a:r>
+              <a:rPr lang="en-IN" dirty="0"/>
+              <a:t>0</a:t>
+            </a:r>
+          </a:p>
+        </p:txBody>
+      </p:sp>
+      <p:sp>
+        <p:nvSpPr>
+          <p:cNvPr id="7" name="TextBox 6">
+            <a:extLst>
+              <a:ext uri="{FF2B5EF4-FFF2-40B4-BE49-F238E27FC236}">
+                <a16:creationId xmlns:a16="http://schemas.microsoft.com/office/drawing/2014/main" id="{457B2F07-4C68-73CF-6087-B42656618FE2}"/>
+              </a:ext>
+            </a:extLst>
+          </p:cNvPr>
+          <p:cNvSpPr txBox="1"/>
+          <p:nvPr/>
+        </p:nvSpPr>
+        <p:spPr>
+          <a:xfrm>
+            <a:off x="4379174" y="2263973"/>
+            <a:ext cx="284052" cy="307777"/>
+          </a:xfrm>
+          <a:prstGeom prst="rect">
+            <a:avLst/>
+          </a:prstGeom>
+          <a:noFill/>
+        </p:spPr>
+        <p:txBody>
+          <a:bodyPr wrap="none" rtlCol="0">
+            <a:spAutoFit/>
+          </a:bodyPr>
+          <a:lstStyle/>
+          <a:p>
+            <a:r>
+              <a:rPr lang="en-IN" dirty="0"/>
+              <a:t>1</a:t>
+            </a:r>
+          </a:p>
+        </p:txBody>
+      </p:sp>
+    </p:spTree>
+    <p:extLst>
+      <p:ext uri="{BB962C8B-B14F-4D97-AF65-F5344CB8AC3E}">
+        <p14:creationId xmlns:p14="http://schemas.microsoft.com/office/powerpoint/2010/main" val="1559068308"/>
+      </p:ext>
+    </p:extLst>
+  </p:cSld>
+  <p:clrMapOvr>
+    <a:masterClrMapping/>
+  </p:clrMapOvr>
+</p:sld>
+</file>
+
+<file path=ppt/slides/slide13.xml><?xml version="1.0" encoding="utf-8"?>
 <p:sld xmlns:a="http://schemas.openxmlformats.org/drawingml/2006/main" xmlns:r="http://schemas.openxmlformats.org/officeDocument/2006/relationships" xmlns:p="http://schemas.openxmlformats.org/presentationml/2006/main">
   <p:cSld>
     <p:spTree>
@@ -6893,7 +7040,7 @@
         </p:blipFill>
         <p:spPr>
           <a:xfrm>
-            <a:off x="2472745" y="1097184"/>
+            <a:off x="2459586" y="1251731"/>
             <a:ext cx="3656269" cy="3123311"/>
           </a:xfrm>
           <a:prstGeom prst="rect">

--- a/Presentations/AVR Live Class 6.pptx
+++ b/Presentations/AVR Live Class 6.pptx
@@ -296,52 +296,22 @@
   <pc:docChgLst>
     <pc:chgData name="Sreejith Rajan" userId="ec11bca0e4bee75f" providerId="LiveId" clId="{7B4F392D-EAB3-4CE7-903E-F84869825F47}"/>
     <pc:docChg chg="undo custSel addSld delSld modSld sldOrd">
-      <pc:chgData name="Sreejith Rajan" userId="ec11bca0e4bee75f" providerId="LiveId" clId="{7B4F392D-EAB3-4CE7-903E-F84869825F47}" dt="2025-11-27T14:57:36.436" v="824" actId="1076"/>
+      <pc:chgData name="Sreejith Rajan" userId="ec11bca0e4bee75f" providerId="LiveId" clId="{7B4F392D-EAB3-4CE7-903E-F84869825F47}" dt="2026-02-03T16:46:40.760" v="826" actId="20577"/>
       <pc:docMkLst>
         <pc:docMk/>
       </pc:docMkLst>
       <pc:sldChg chg="modSp mod">
-        <pc:chgData name="Sreejith Rajan" userId="ec11bca0e4bee75f" providerId="LiveId" clId="{7B4F392D-EAB3-4CE7-903E-F84869825F47}" dt="2025-11-27T14:57:36.436" v="824" actId="1076"/>
+        <pc:chgData name="Sreejith Rajan" userId="ec11bca0e4bee75f" providerId="LiveId" clId="{7B4F392D-EAB3-4CE7-903E-F84869825F47}" dt="2026-02-03T16:46:40.760" v="826" actId="20577"/>
         <pc:sldMkLst>
           <pc:docMk/>
-          <pc:sldMk cId="1389626550" sldId="267"/>
-        </pc:sldMkLst>
-        <pc:picChg chg="mod">
-          <ac:chgData name="Sreejith Rajan" userId="ec11bca0e4bee75f" providerId="LiveId" clId="{7B4F392D-EAB3-4CE7-903E-F84869825F47}" dt="2025-11-27T14:57:36.436" v="824" actId="1076"/>
-          <ac:picMkLst>
-            <pc:docMk/>
-            <pc:sldMk cId="1389626550" sldId="267"/>
-            <ac:picMk id="4" creationId="{C49C1DF3-C6D7-3FBE-C7BE-60CD0077F615}"/>
-          </ac:picMkLst>
-        </pc:picChg>
-      </pc:sldChg>
-      <pc:sldChg chg="delSp modSp mod">
-        <pc:chgData name="Sreejith Rajan" userId="ec11bca0e4bee75f" providerId="LiveId" clId="{7B4F392D-EAB3-4CE7-903E-F84869825F47}" dt="2025-11-25T13:50:35.880" v="537" actId="1076"/>
-        <pc:sldMkLst>
-          <pc:docMk/>
-          <pc:sldMk cId="2517281589" sldId="274"/>
+          <pc:sldMk cId="1380718396" sldId="289"/>
         </pc:sldMkLst>
         <pc:spChg chg="mod">
-          <ac:chgData name="Sreejith Rajan" userId="ec11bca0e4bee75f" providerId="LiveId" clId="{7B4F392D-EAB3-4CE7-903E-F84869825F47}" dt="2025-11-25T13:50:35.880" v="537" actId="1076"/>
+          <ac:chgData name="Sreejith Rajan" userId="ec11bca0e4bee75f" providerId="LiveId" clId="{7B4F392D-EAB3-4CE7-903E-F84869825F47}" dt="2026-02-03T16:46:40.760" v="826" actId="20577"/>
           <ac:spMkLst>
             <pc:docMk/>
-            <pc:sldMk cId="2517281589" sldId="274"/>
-            <ac:spMk id="54" creationId="{F5C408E8-BC47-B2C2-7462-C129AFFB4F4F}"/>
-          </ac:spMkLst>
-        </pc:spChg>
-      </pc:sldChg>
-      <pc:sldChg chg="addSp delSp modSp add mod">
-        <pc:chgData name="Sreejith Rajan" userId="ec11bca0e4bee75f" providerId="LiveId" clId="{7B4F392D-EAB3-4CE7-903E-F84869825F47}" dt="2025-11-25T15:36:41.492" v="822" actId="12"/>
-        <pc:sldMkLst>
-          <pc:docMk/>
-          <pc:sldMk cId="1559068308" sldId="290"/>
-        </pc:sldMkLst>
-        <pc:spChg chg="mod">
-          <ac:chgData name="Sreejith Rajan" userId="ec11bca0e4bee75f" providerId="LiveId" clId="{7B4F392D-EAB3-4CE7-903E-F84869825F47}" dt="2025-11-25T15:36:41.492" v="822" actId="12"/>
-          <ac:spMkLst>
-            <pc:docMk/>
-            <pc:sldMk cId="1559068308" sldId="290"/>
-            <ac:spMk id="54" creationId="{68629363-375B-DB57-5488-0DDA54605AC4}"/>
+            <pc:sldMk cId="1380718396" sldId="289"/>
+            <ac:spMk id="55" creationId="{D02D7CAE-38F8-8545-FFF6-1F577A01BE56}"/>
           </ac:spMkLst>
         </pc:spChg>
       </pc:sldChg>
